--- a/edu-agent/artifacts/finale/finale.pptx
+++ b/edu-agent/artifacts/finale/finale.pptx
@@ -1868,8 +1868,8 @@
         </p:blipFill>
         <p:spPr>
           <a:xfrm>
-            <a:off x="2667000" y="15478125"/>
-            <a:ext cx="4953000" cy="1805781"/>
+            <a:off x="1714500" y="15478125"/>
+            <a:ext cx="6858000" cy="2500312"/>
           </a:xfrm>
           <a:prstGeom prst="rect">
             <a:avLst/>
@@ -3260,8 +3260,8 @@
         </p:blipFill>
         <p:spPr>
           <a:xfrm>
-            <a:off x="2667000" y="15478125"/>
-            <a:ext cx="4953000" cy="1805781"/>
+            <a:off x="1714500" y="15478125"/>
+            <a:ext cx="6858000" cy="2500312"/>
           </a:xfrm>
           <a:prstGeom prst="rect">
             <a:avLst/>

--- a/edu-agent/artifacts/finale/finale.pptx
+++ b/edu-agent/artifacts/finale/finale.pptx
@@ -109,6 +109,169 @@
     </a:lvl9pPr>
   </p:defaultTextStyle>
 </p:presentation>
+</file>
+
+<file path=ppt/charts/chart1.xml><?xml version="1.0" encoding="utf-8"?>
+<c:chartSpace xmlns:c="http://schemas.openxmlformats.org/drawingml/2006/chart" xmlns:a="http://schemas.openxmlformats.org/drawingml/2006/main" xmlns:r="http://schemas.openxmlformats.org/officeDocument/2006/relationships">
+  <c:date1904 val="0"/>
+  <c:chart>
+    <c:autoTitleDeleted val="0"/>
+    <c:plotArea>
+      <c:barChart>
+        <c:barDir val="bar"/>
+        <c:grouping val="clustered"/>
+        <c:ser>
+          <c:idx val="0"/>
+          <c:order val="0"/>
+          <c:tx>
+            <c:strRef>
+              <c:f>Sheet1!$B$1</c:f>
+              <c:strCache>
+                <c:ptCount val="1"/>
+                <c:pt idx="0">
+                  <c:v>Wins</c:v>
+                </c:pt>
+              </c:strCache>
+            </c:strRef>
+          </c:tx>
+          <c:spPr>
+            <a:solidFill>
+              <a:srgbClr val="E01806"/>
+            </a:solidFill>
+          </c:spPr>
+          <c:cat>
+            <c:strRef>
+              <c:f>Sheet1!$A$2:$A$5</c:f>
+              <c:strCache>
+                <c:ptCount val="4"/>
+                <c:pt idx="0">
+                  <c:v>Ferrari</c:v>
+                </c:pt>
+                <c:pt idx="1">
+                  <c:v>BAR Honda</c:v>
+                </c:pt>
+                <c:pt idx="2">
+                  <c:v>Renault</c:v>
+                </c:pt>
+                <c:pt idx="3">
+                  <c:v>Williams</c:v>
+                </c:pt>
+              </c:strCache>
+            </c:strRef>
+          </c:cat>
+          <c:val>
+            <c:numRef>
+              <c:f>Sheet1!$B$2:$B$5</c:f>
+              <c:numCache>
+                <c:formatCode>General</c:formatCode>
+                <c:ptCount val="4"/>
+                <c:pt idx="0">
+                  <c:v>15</c:v>
+                </c:pt>
+                <c:pt idx="1">
+                  <c:v>1</c:v>
+                </c:pt>
+                <c:pt idx="2">
+                  <c:v>1</c:v>
+                </c:pt>
+                <c:pt idx="3">
+                  <c:v>1</c:v>
+                </c:pt>
+              </c:numCache>
+            </c:numRef>
+          </c:val>
+        </c:ser>
+        <c:dLbls>
+          <c:numFmt formatCode="0" sourceLinked="0"/>
+          <c:txPr>
+            <a:bodyPr/>
+            <a:lstStyle/>
+            <a:p>
+              <a:pPr>
+                <a:defRPr sz="3000" b="1"/>
+              </a:pPr>
+            </a:p>
+          </c:txPr>
+          <c:dLblPos val="outEnd"/>
+          <c:showLegendKey val="0"/>
+          <c:showVal val="1"/>
+          <c:showCatName val="0"/>
+          <c:showSerName val="0"/>
+          <c:showPercent val="0"/>
+          <c:showBubbleSize val="0"/>
+          <c:showLeaderLines val="1"/>
+        </c:dLbls>
+        <c:gapWidth val="55"/>
+        <c:axId val="-2068027336"/>
+        <c:axId val="-2113994440"/>
+      </c:barChart>
+      <c:catAx>
+        <c:axId val="-2068027336"/>
+        <c:scaling>
+          <c:orientation val="maxMin"/>
+        </c:scaling>
+        <c:delete val="0"/>
+        <c:axPos val="l"/>
+        <c:majorTickMark val="out"/>
+        <c:minorTickMark val="none"/>
+        <c:tickLblPos val="nextTo"/>
+        <c:spPr>
+          <a:ln>
+            <a:noFill/>
+          </a:ln>
+        </c:spPr>
+        <c:txPr>
+          <a:bodyPr/>
+          <a:lstStyle/>
+          <a:p>
+            <a:pPr>
+              <a:defRPr sz="2800"/>
+            </a:pPr>
+          </a:p>
+        </c:txPr>
+        <c:crossAx val="-2113994440"/>
+        <c:crosses val="autoZero"/>
+        <c:auto val="1"/>
+        <c:lblAlgn val="ctr"/>
+        <c:lblOffset val="100"/>
+        <c:noMultiLvlLbl val="0"/>
+      </c:catAx>
+      <c:valAx>
+        <c:axId val="-2113994440"/>
+        <c:scaling>
+          <c:max val="17.0"/>
+          <c:min val="0.0"/>
+        </c:scaling>
+        <c:delete/>
+        <c:axPos val="b"/>
+        <c:majorTickMark val="out"/>
+        <c:minorTickMark val="none"/>
+        <c:tickLblPos val="nextTo"/>
+        <c:crossAx val="-2068027336"/>
+        <c:crosses val="autoZero"/>
+      </c:valAx>
+    </c:plotArea>
+    <c:dispBlanksAs val="gap"/>
+  </c:chart>
+  <c:txPr>
+    <a:bodyPr/>
+    <a:lstStyle/>
+    <a:p>
+      <a:pPr>
+        <a:defRPr sz="1800">
+          <a:solidFill>
+            <a:srgbClr val="1A0E0B"/>
+          </a:solidFill>
+          <a:latin typeface="Arial"/>
+        </a:defRPr>
+      </a:pPr>
+      <a:endParaRPr lang="en-US"/>
+    </a:p>
+  </c:txPr>
+  <c:externalData r:id="rId1">
+    <c:autoUpdate val="0"/>
+  </c:externalData>
+</c:chartSpace>
 </file>
 
 <file path=ppt/slideLayouts/slideLayout7.xml><?xml version="1.0" encoding="utf-8"?>
@@ -690,7 +853,7 @@
           <p:nvPr/>
         </p:nvPicPr>
         <p:blipFill>
-          <a:blip r:embed="rId3"/>
+          <a:blip r:embed="rId2"/>
           <a:stretch>
             <a:fillRect/>
           </a:stretch>
@@ -1341,527 +1504,34 @@
           </p:txBody>
         </p:sp>
       </p:grpSp>
-      <p:grpSp>
-        <p:nvGrpSpPr>
-          <p:cNvPr id="21" name="!!stage"/>
-          <p:cNvGrpSpPr/>
+      <p:graphicFrame>
+        <p:nvGraphicFramePr>
+          <p:cNvPr id="12" name="!!stage"/>
+          <p:cNvGraphicFramePr>
+            <a:graphicFrameLocks noGrp="1"/>
+          </p:cNvGraphicFramePr>
           <p:nvPr/>
-        </p:nvGrpSpPr>
-        <p:grpSpPr>
-          <a:xfrm>
-            <a:off x="749046" y="7378700"/>
-            <a:ext cx="8394954" cy="7756779"/>
-            <a:chOff x="749046" y="7378700"/>
-            <a:chExt cx="8394954" cy="7756779"/>
-          </a:xfrm>
-        </p:grpSpPr>
-        <p:sp>
-          <p:nvSpPr>
-            <p:cNvPr id="7" name="TextBox 7"/>
-            <p:cNvSpPr txBox="1"/>
-            <p:nvPr/>
-          </p:nvSpPr>
-          <p:spPr>
-            <a:xfrm>
-              <a:off x="752094" y="7378700"/>
-              <a:ext cx="798994" cy="381381"/>
-            </a:xfrm>
-            <a:prstGeom prst="rect">
-              <a:avLst/>
-            </a:prstGeom>
-            <a:noFill/>
-            <a:ln>
-              <a:noFill/>
-            </a:ln>
-          </p:spPr>
-          <p:txBody>
-            <a:bodyPr wrap="none" lIns="0" tIns="0" rIns="0" bIns="0" anchor="t" anchorCtr="0">
-              <a:spAutoFit/>
-            </a:bodyPr>
-            <a:lstStyle/>
-            <a:p>
-              <a:pPr algn="l"/>
-              <a:r>
-                <a:rPr lang="en-US" sz="1950" dirty="0">
-                  <a:solidFill>
-                    <a:srgbClr val="6B5148"/>
-                  </a:solidFill>
-                  <a:latin typeface="+mn-lt"/>
-                  <a:ea typeface="+mn-ea"/>
-                  <a:cs typeface="+mn-cs"/>
-                </a:rPr>
-                <a:t>Ferrari</a:t>
-              </a:r>
-            </a:p>
-          </p:txBody>
-        </p:sp>
-        <p:sp>
-          <p:nvSpPr>
-            <p:cNvPr id="8" name="Rectangle 8"/>
-            <p:cNvSpPr/>
-            <p:nvPr/>
-          </p:nvSpPr>
-          <p:spPr>
-            <a:xfrm>
-              <a:off x="762000" y="7810500"/>
-              <a:ext cx="8382000" cy="723900"/>
-            </a:xfrm>
-            <a:prstGeom prst="roundRect">
-              <a:avLst>
-                <a:gd name="adj" fmla="val 10526"/>
-              </a:avLst>
-            </a:prstGeom>
-            <a:solidFill>
-              <a:schemeClr val="lt1"/>
-            </a:solidFill>
-            <a:ln>
-              <a:noFill/>
-            </a:ln>
-          </p:spPr>
-        </p:sp>
-        <p:sp>
-          <p:nvSpPr>
-            <p:cNvPr id="9" name="TextBox 9"/>
-            <p:cNvSpPr txBox="1"/>
-            <p:nvPr/>
-          </p:nvSpPr>
-          <p:spPr>
-            <a:xfrm>
-              <a:off x="973074" y="7893050"/>
-              <a:ext cx="551694" cy="674751"/>
-            </a:xfrm>
-            <a:prstGeom prst="rect">
-              <a:avLst/>
-            </a:prstGeom>
-            <a:noFill/>
-            <a:ln>
-              <a:noFill/>
-            </a:ln>
-          </p:spPr>
-          <p:txBody>
-            <a:bodyPr wrap="none" lIns="0" tIns="0" rIns="0" bIns="0" anchor="t" anchorCtr="0">
-              <a:spAutoFit/>
-            </a:bodyPr>
-            <a:lstStyle/>
-            <a:p>
-              <a:pPr algn="l"/>
-              <a:r>
-                <a:rPr lang="en-US" sz="3450" b="1" dirty="0">
-                  <a:solidFill>
-                    <a:schemeClr val="dk1"/>
-                  </a:solidFill>
-                  <a:latin typeface="+mn-lt"/>
-                  <a:ea typeface="+mn-ea"/>
-                  <a:cs typeface="+mn-cs"/>
-                </a:rPr>
-                <a:t>15</a:t>
-              </a:r>
-            </a:p>
-          </p:txBody>
-        </p:sp>
-        <p:sp>
-          <p:nvSpPr>
-            <p:cNvPr id="10" name="TextBox 10"/>
-            <p:cNvSpPr txBox="1"/>
-            <p:nvPr/>
-          </p:nvSpPr>
-          <p:spPr>
-            <a:xfrm>
-              <a:off x="752094" y="8997950"/>
-              <a:ext cx="1445357" cy="381381"/>
-            </a:xfrm>
-            <a:prstGeom prst="rect">
-              <a:avLst/>
-            </a:prstGeom>
-            <a:noFill/>
-            <a:ln>
-              <a:noFill/>
-            </a:ln>
-          </p:spPr>
-          <p:txBody>
-            <a:bodyPr wrap="none" lIns="0" tIns="0" rIns="0" bIns="0" anchor="t" anchorCtr="0">
-              <a:spAutoFit/>
-            </a:bodyPr>
-            <a:lstStyle/>
-            <a:p>
-              <a:pPr algn="l"/>
-              <a:r>
-                <a:rPr lang="en-US" sz="1950" dirty="0">
-                  <a:solidFill>
-                    <a:srgbClr val="6B5148"/>
-                  </a:solidFill>
-                  <a:latin typeface="+mn-lt"/>
-                  <a:ea typeface="+mn-ea"/>
-                  <a:cs typeface="+mn-cs"/>
-                </a:rPr>
-                <a:t>BAR Honda</a:t>
-              </a:r>
-            </a:p>
-          </p:txBody>
-        </p:sp>
-        <p:sp>
-          <p:nvSpPr>
-            <p:cNvPr id="11" name="Rectangle 11"/>
-            <p:cNvSpPr/>
-            <p:nvPr/>
-          </p:nvSpPr>
-          <p:spPr>
-            <a:xfrm>
-              <a:off x="762000" y="9429750"/>
-              <a:ext cx="2457450" cy="723900"/>
-            </a:xfrm>
-            <a:prstGeom prst="roundRect">
-              <a:avLst>
-                <a:gd name="adj" fmla="val 10526"/>
-              </a:avLst>
-            </a:prstGeom>
-            <a:solidFill>
-              <a:srgbClr val="D8CEC8"/>
-            </a:solidFill>
-            <a:ln>
-              <a:noFill/>
-            </a:ln>
-          </p:spPr>
-        </p:sp>
-        <p:sp>
-          <p:nvSpPr>
-            <p:cNvPr id="12" name="TextBox 12"/>
-            <p:cNvSpPr txBox="1"/>
-            <p:nvPr/>
-          </p:nvSpPr>
-          <p:spPr>
-            <a:xfrm>
-              <a:off x="973074" y="9512300"/>
-              <a:ext cx="293373" cy="674751"/>
-            </a:xfrm>
-            <a:prstGeom prst="rect">
-              <a:avLst/>
-            </a:prstGeom>
-            <a:noFill/>
-            <a:ln>
-              <a:noFill/>
-            </a:ln>
-          </p:spPr>
-          <p:txBody>
-            <a:bodyPr wrap="none" lIns="0" tIns="0" rIns="0" bIns="0" anchor="t" anchorCtr="0">
-              <a:spAutoFit/>
-            </a:bodyPr>
-            <a:lstStyle/>
-            <a:p>
-              <a:pPr algn="l"/>
-              <a:r>
-                <a:rPr lang="en-US" sz="3450" b="1" dirty="0">
-                  <a:solidFill>
-                    <a:srgbClr val="1A0E0B"/>
-                  </a:solidFill>
-                  <a:latin typeface="+mn-lt"/>
-                  <a:ea typeface="+mn-ea"/>
-                  <a:cs typeface="+mn-cs"/>
-                </a:rPr>
-                <a:t>1</a:t>
-              </a:r>
-            </a:p>
-          </p:txBody>
-        </p:sp>
-        <p:sp>
-          <p:nvSpPr>
-            <p:cNvPr id="13" name="TextBox 13"/>
-            <p:cNvSpPr txBox="1"/>
-            <p:nvPr/>
-          </p:nvSpPr>
-          <p:spPr>
-            <a:xfrm>
-              <a:off x="752094" y="10617200"/>
-              <a:ext cx="931998" cy="381381"/>
-            </a:xfrm>
-            <a:prstGeom prst="rect">
-              <a:avLst/>
-            </a:prstGeom>
-            <a:noFill/>
-            <a:ln>
-              <a:noFill/>
-            </a:ln>
-          </p:spPr>
-          <p:txBody>
-            <a:bodyPr wrap="none" lIns="0" tIns="0" rIns="0" bIns="0" anchor="t" anchorCtr="0">
-              <a:spAutoFit/>
-            </a:bodyPr>
-            <a:lstStyle/>
-            <a:p>
-              <a:pPr algn="l"/>
-              <a:r>
-                <a:rPr lang="en-US" sz="1950" dirty="0">
-                  <a:solidFill>
-                    <a:srgbClr val="6B5148"/>
-                  </a:solidFill>
-                  <a:latin typeface="+mn-lt"/>
-                  <a:ea typeface="+mn-ea"/>
-                  <a:cs typeface="+mn-cs"/>
-                </a:rPr>
-                <a:t>Renault</a:t>
-              </a:r>
-            </a:p>
-          </p:txBody>
-        </p:sp>
-        <p:sp>
-          <p:nvSpPr>
-            <p:cNvPr id="14" name="Rectangle 14"/>
-            <p:cNvSpPr/>
-            <p:nvPr/>
-          </p:nvSpPr>
-          <p:spPr>
-            <a:xfrm>
-              <a:off x="762000" y="11049000"/>
-              <a:ext cx="1676400" cy="723900"/>
-            </a:xfrm>
-            <a:prstGeom prst="roundRect">
-              <a:avLst>
-                <a:gd name="adj" fmla="val 10526"/>
-              </a:avLst>
-            </a:prstGeom>
-            <a:solidFill>
-              <a:srgbClr val="D8CEC8"/>
-            </a:solidFill>
-            <a:ln>
-              <a:noFill/>
-            </a:ln>
-          </p:spPr>
-        </p:sp>
-        <p:sp>
-          <p:nvSpPr>
-            <p:cNvPr id="15" name="TextBox 15"/>
-            <p:cNvSpPr txBox="1"/>
-            <p:nvPr/>
-          </p:nvSpPr>
-          <p:spPr>
-            <a:xfrm>
-              <a:off x="973074" y="11131550"/>
-              <a:ext cx="293373" cy="674751"/>
-            </a:xfrm>
-            <a:prstGeom prst="rect">
-              <a:avLst/>
-            </a:prstGeom>
-            <a:noFill/>
-            <a:ln>
-              <a:noFill/>
-            </a:ln>
-          </p:spPr>
-          <p:txBody>
-            <a:bodyPr wrap="none" lIns="0" tIns="0" rIns="0" bIns="0" anchor="t" anchorCtr="0">
-              <a:spAutoFit/>
-            </a:bodyPr>
-            <a:lstStyle/>
-            <a:p>
-              <a:pPr algn="l"/>
-              <a:r>
-                <a:rPr lang="en-US" sz="3450" b="1" dirty="0">
-                  <a:solidFill>
-                    <a:srgbClr val="1A0E0B"/>
-                  </a:solidFill>
-                  <a:latin typeface="+mn-lt"/>
-                  <a:ea typeface="+mn-ea"/>
-                  <a:cs typeface="+mn-cs"/>
-                </a:rPr>
-                <a:t>1</a:t>
-              </a:r>
-            </a:p>
-          </p:txBody>
-        </p:sp>
-        <p:sp>
-          <p:nvSpPr>
-            <p:cNvPr id="16" name="TextBox 16"/>
-            <p:cNvSpPr txBox="1"/>
-            <p:nvPr/>
-          </p:nvSpPr>
-          <p:spPr>
-            <a:xfrm>
-              <a:off x="752094" y="12236450"/>
-              <a:ext cx="1003731" cy="381381"/>
-            </a:xfrm>
-            <a:prstGeom prst="rect">
-              <a:avLst/>
-            </a:prstGeom>
-            <a:noFill/>
-            <a:ln>
-              <a:noFill/>
-            </a:ln>
-          </p:spPr>
-          <p:txBody>
-            <a:bodyPr wrap="none" lIns="0" tIns="0" rIns="0" bIns="0" anchor="t" anchorCtr="0">
-              <a:spAutoFit/>
-            </a:bodyPr>
-            <a:lstStyle/>
-            <a:p>
-              <a:pPr algn="l"/>
-              <a:r>
-                <a:rPr lang="en-US" sz="1950" dirty="0">
-                  <a:solidFill>
-                    <a:srgbClr val="6B5148"/>
-                  </a:solidFill>
-                  <a:latin typeface="+mn-lt"/>
-                  <a:ea typeface="+mn-ea"/>
-                  <a:cs typeface="+mn-cs"/>
-                </a:rPr>
-                <a:t>Williams</a:t>
-              </a:r>
-            </a:p>
-          </p:txBody>
-        </p:sp>
-        <p:sp>
-          <p:nvSpPr>
-            <p:cNvPr id="17" name="Rectangle 17"/>
-            <p:cNvSpPr/>
-            <p:nvPr/>
-          </p:nvSpPr>
-          <p:spPr>
-            <a:xfrm>
-              <a:off x="762000" y="12668250"/>
-              <a:ext cx="1114425" cy="723900"/>
-            </a:xfrm>
-            <a:prstGeom prst="roundRect">
-              <a:avLst>
-                <a:gd name="adj" fmla="val 10526"/>
-              </a:avLst>
-            </a:prstGeom>
-            <a:solidFill>
-              <a:srgbClr val="D8CEC8"/>
-            </a:solidFill>
-            <a:ln>
-              <a:noFill/>
-            </a:ln>
-          </p:spPr>
-        </p:sp>
-        <p:sp>
-          <p:nvSpPr>
-            <p:cNvPr id="18" name="TextBox 18"/>
-            <p:cNvSpPr txBox="1"/>
-            <p:nvPr/>
-          </p:nvSpPr>
-          <p:spPr>
-            <a:xfrm>
-              <a:off x="973074" y="12750800"/>
-              <a:ext cx="293373" cy="674751"/>
-            </a:xfrm>
-            <a:prstGeom prst="rect">
-              <a:avLst/>
-            </a:prstGeom>
-            <a:noFill/>
-            <a:ln>
-              <a:noFill/>
-            </a:ln>
-          </p:spPr>
-          <p:txBody>
-            <a:bodyPr wrap="none" lIns="0" tIns="0" rIns="0" bIns="0" anchor="t" anchorCtr="0">
-              <a:spAutoFit/>
-            </a:bodyPr>
-            <a:lstStyle/>
-            <a:p>
-              <a:pPr algn="l"/>
-              <a:r>
-                <a:rPr lang="en-US" sz="3450" b="1" dirty="0">
-                  <a:solidFill>
-                    <a:srgbClr val="1A0E0B"/>
-                  </a:solidFill>
-                  <a:latin typeface="+mn-lt"/>
-                  <a:ea typeface="+mn-ea"/>
-                  <a:cs typeface="+mn-cs"/>
-                </a:rPr>
-                <a:t>1</a:t>
-              </a:r>
-            </a:p>
-          </p:txBody>
-        </p:sp>
-        <p:sp>
-          <p:nvSpPr>
-            <p:cNvPr id="19" name="TextBox 19"/>
-            <p:cNvSpPr txBox="1"/>
-            <p:nvPr/>
-          </p:nvSpPr>
-          <p:spPr>
-            <a:xfrm>
-              <a:off x="749046" y="14160500"/>
-              <a:ext cx="4853743" cy="498729"/>
-            </a:xfrm>
-            <a:prstGeom prst="rect">
-              <a:avLst/>
-            </a:prstGeom>
-            <a:noFill/>
-            <a:ln>
-              <a:noFill/>
-            </a:ln>
-          </p:spPr>
-          <p:txBody>
-            <a:bodyPr wrap="none" lIns="0" tIns="0" rIns="0" bIns="0" anchor="t" anchorCtr="0">
-              <a:spAutoFit/>
-            </a:bodyPr>
-            <a:lstStyle/>
-            <a:p>
-              <a:pPr algn="l"/>
-              <a:r>
-                <a:rPr lang="en-US" sz="2550" dirty="0">
-                  <a:solidFill>
-                    <a:srgbClr val="1A0E0B"/>
-                  </a:solidFill>
-                  <a:latin typeface="+mn-lt"/>
-                  <a:ea typeface="+mn-ea"/>
-                  <a:cs typeface="+mn-cs"/>
-                </a:rPr>
-                <a:t>15 of 18 — no other constructor</a:t>
-              </a:r>
-            </a:p>
-          </p:txBody>
-        </p:sp>
-        <p:sp>
-          <p:nvSpPr>
-            <p:cNvPr id="20" name="TextBox 20"/>
-            <p:cNvSpPr txBox="1"/>
-            <p:nvPr/>
-          </p:nvSpPr>
-          <p:spPr>
-            <a:xfrm>
-              <a:off x="749046" y="14636750"/>
-              <a:ext cx="4433911" cy="498729"/>
-            </a:xfrm>
-            <a:prstGeom prst="rect">
-              <a:avLst/>
-            </a:prstGeom>
-            <a:noFill/>
-            <a:ln>
-              <a:noFill/>
-            </a:ln>
-          </p:spPr>
-          <p:txBody>
-            <a:bodyPr wrap="none" lIns="0" tIns="0" rIns="0" bIns="0" anchor="t" anchorCtr="0">
-              <a:spAutoFit/>
-            </a:bodyPr>
-            <a:lstStyle/>
-            <a:p>
-              <a:pPr algn="l"/>
-              <a:r>
-                <a:rPr lang="en-US" sz="2550" dirty="0">
-                  <a:solidFill>
-                    <a:srgbClr val="1A0E0B"/>
-                  </a:solidFill>
-                  <a:latin typeface="+mn-lt"/>
-                  <a:ea typeface="+mn-ea"/>
-                  <a:cs typeface="+mn-cs"/>
-                </a:rPr>
-                <a:t>won more than a single race.</a:t>
-              </a:r>
-            </a:p>
-          </p:txBody>
-        </p:sp>
-      </p:grpSp>
+        </p:nvGraphicFramePr>
+        <p:xfrm>
+          <a:off x="762000" y="7381875"/>
+          <a:ext cx="8382000" cy="6667500"/>
+        </p:xfrm>
+        <a:graphic>
+          <a:graphicData uri="http://schemas.openxmlformats.org/drawingml/2006/chart">
+            <c:chart xmlns:c="http://schemas.openxmlformats.org/drawingml/2006/chart" xmlns:r="http://schemas.openxmlformats.org/officeDocument/2006/relationships" r:id="rId2"/>
+          </a:graphicData>
+        </a:graphic>
+      </p:graphicFrame>
       <p:pic xmlns:r="http://schemas.openxmlformats.org/officeDocument/2006/relationships">
         <p:nvPicPr>
-          <p:cNvPr id="22" name="!!car" descr="F1 car, turntable angle 120 deg"/>
+          <p:cNvPr id="21" name="!!car" descr="F1 car, turntable angle 120 deg"/>
           <p:cNvPicPr>
             <a:picLocks noChangeAspect="1"/>
           </p:cNvPicPr>
           <p:nvPr/>
         </p:nvPicPr>
         <p:blipFill>
-          <a:blip r:embed="rId2"/>
+          <a:blip r:embed="rId3"/>
           <a:stretch>
             <a:fillRect/>
           </a:stretch>
@@ -1876,6 +1546,86 @@
           </a:prstGeom>
         </p:spPr>
       </p:pic>
+      <p:sp>
+        <p:nvSpPr>
+          <p:cNvPr id="19" name="TextBox 19"/>
+          <p:cNvSpPr txBox="1"/>
+          <p:nvPr/>
+        </p:nvSpPr>
+        <p:spPr>
+          <a:xfrm>
+            <a:off x="749046" y="14160500"/>
+            <a:ext cx="4853743" cy="498729"/>
+          </a:xfrm>
+          <a:prstGeom prst="rect">
+            <a:avLst/>
+          </a:prstGeom>
+          <a:noFill/>
+          <a:ln>
+            <a:noFill/>
+          </a:ln>
+        </p:spPr>
+        <p:txBody>
+          <a:bodyPr wrap="none" lIns="0" tIns="0" rIns="0" bIns="0" anchor="t" anchorCtr="0">
+            <a:spAutoFit/>
+          </a:bodyPr>
+          <a:lstStyle/>
+          <a:p>
+            <a:pPr algn="l"/>
+            <a:r>
+              <a:rPr lang="en-US" sz="2550" dirty="0">
+                <a:solidFill>
+                  <a:srgbClr val="1A0E0B"/>
+                </a:solidFill>
+                <a:latin typeface="+mn-lt"/>
+                <a:ea typeface="+mn-ea"/>
+                <a:cs typeface="+mn-cs"/>
+              </a:rPr>
+              <a:t>15 of 18 — no other constructor</a:t>
+            </a:r>
+          </a:p>
+        </p:txBody>
+      </p:sp>
+      <p:sp>
+        <p:nvSpPr>
+          <p:cNvPr id="20" name="TextBox 20"/>
+          <p:cNvSpPr txBox="1"/>
+          <p:nvPr/>
+        </p:nvSpPr>
+        <p:spPr>
+          <a:xfrm>
+            <a:off x="749046" y="14636750"/>
+            <a:ext cx="4433911" cy="498729"/>
+          </a:xfrm>
+          <a:prstGeom prst="rect">
+            <a:avLst/>
+          </a:prstGeom>
+          <a:noFill/>
+          <a:ln>
+            <a:noFill/>
+          </a:ln>
+        </p:spPr>
+        <p:txBody>
+          <a:bodyPr wrap="none" lIns="0" tIns="0" rIns="0" bIns="0" anchor="t" anchorCtr="0">
+            <a:spAutoFit/>
+          </a:bodyPr>
+          <a:lstStyle/>
+          <a:p>
+            <a:pPr algn="l"/>
+            <a:r>
+              <a:rPr lang="en-US" sz="2550" dirty="0">
+                <a:solidFill>
+                  <a:srgbClr val="1A0E0B"/>
+                </a:solidFill>
+                <a:latin typeface="+mn-lt"/>
+                <a:ea typeface="+mn-ea"/>
+                <a:cs typeface="+mn-cs"/>
+              </a:rPr>
+              <a:t>won more than a single race.</a:t>
+            </a:r>
+          </a:p>
+        </p:txBody>
+      </p:sp>
     </p:spTree>
   </p:cSld>
   <p:clrMapOvr>
@@ -2136,7 +1886,7 @@
           <p:nvPr/>
         </p:nvPicPr>
         <p:blipFill>
-          <a:blip r:embed="rId3"/>
+          <a:blip r:embed="rId2"/>
           <a:stretch>
             <a:fillRect/>
           </a:stretch>
